--- a/docs/SIH26123_EdgeFleet_FULL-12slide-Detail.pptx
+++ b/docs/SIH26123_EdgeFleet_FULL-12slide-Detail.pptx
@@ -583,7 +583,7 @@
           <a:lstStyle/>
           <a:p>
             <a:r>
-              <a:t>Practice twice with a timer. Have a 20-second backup screen recording if the judging laptop has no Python. Live first. Recording is insurance. Radio honesty if asked: 40% loss still completes 6/6 in 93-125 ticks with 0 deadlocks; 3 ticks of delay still never deadlocks but starves E1 to 3/6 with 577 intention conflicts; 70% loss lands only 1-5/6. All of that is results/degradation.json, measured, not typed.</a:t>
+              <a:t>Practice twice with a timer. Have a 20-second backup screen recording if the judging laptop has no Python. Live first. Recording is insurance. Radio honesty if asked: 40% loss still completes 6/6 in 137-196 ticks with 0 deadlocks; 3 ticks of delay still completes 6/6 at 103 ticks with 0 intention conflicts; 70% loss still completes 6/6 in 141-213 ticks with 0.6 deadlocks. And 8 robots / 16 tasks finish 5/5 seeds at 327 ticks. All of that is results/degradation.json and results/probe_26123_scale_delay.json, measured, not typed.</a:t>
             </a:r>
           </a:p>
         </p:txBody>
@@ -1283,7 +1283,7 @@
           <a:lstStyle/>
           <a:p>
             <a:r>
-              <a:t>Memorize: 72 / 51 / 85. Baseline deadlocks. Ours finishes. If they push for a percentage, repeat: a percentage against an incomplete baseline is a lie.</a:t>
+              <a:t>Memorize: 93 / 50 / 99 / 327. Baseline deadlocks. Ours finishes. If they push for a percentage, repeat: a percentage against an incomplete baseline is a lie. Source: metrics.json for the first three rows, probe_26123_scale_delay.json for the 8-robot row, probe_26123_ablation.json for the RC1-RC5 attribution. Robustness: 40% loss finishes 137-196 ticks, 3-tick delay finishes 103 ticks with 0 conflicts, 70% loss finishes 141-213 ticks. 8 robots is our measured ceiling; we do not claim 40-robot scale.</a:t>
             </a:r>
           </a:p>
         </p:txBody>
@@ -5474,7 +5474,7 @@
                 </a:solidFill>
                 <a:latin typeface="Calibri"/>
               </a:rPr>
-              <a:t>Drag packet-loss to 40%: same 6/6 finish, later (93–125 vs 72), 0 deadlocks.</a:t>
+              <a:t>Drag packet-loss to 40%: same 6/6 finish, later (137–196 vs 93), 0 deadlocks.</a:t>
             </a:r>
           </a:p>
         </p:txBody>
@@ -10905,7 +10905,7 @@
                 </a:solidFill>
                 <a:latin typeface="Calibri"/>
               </a:rPr>
-              <a:t>Indoor 5G/Wi-Fi is lossy: at 40% packet loss the same 6/6 still finish, just later (93–125 ticks vs 72 clean) with 0 deadlocks. Sliders are live.</a:t>
+              <a:t>Indoor 5G/Wi-Fi is lossy: at 40% packet loss the same 6/6 still finish, just later (137–196 ticks vs 93 clean) with 0 deadlocks. Sliders are live.</a:t>
             </a:r>
           </a:p>
         </p:txBody>
@@ -11179,7 +11179,7 @@
         </p:nvSpPr>
         <p:spPr>
           <a:xfrm>
-            <a:off x="502920" y="1554480"/>
+            <a:off x="502920" y="1481328"/>
             <a:ext cx="3017520" cy="502920"/>
           </a:xfrm>
           <a:prstGeom prst="rect">
@@ -11222,7 +11222,7 @@
         </p:nvSpPr>
         <p:spPr>
           <a:xfrm>
-            <a:off x="612648" y="1664208"/>
+            <a:off x="612648" y="1591056"/>
             <a:ext cx="2834640" cy="365760"/>
           </a:xfrm>
           <a:prstGeom prst="rect">
@@ -11261,7 +11261,7 @@
         </p:nvSpPr>
         <p:spPr>
           <a:xfrm>
-            <a:off x="3520440" y="1554480"/>
+            <a:off x="3520440" y="1481328"/>
             <a:ext cx="4069080" cy="502920"/>
           </a:xfrm>
           <a:prstGeom prst="rect">
@@ -11304,7 +11304,7 @@
         </p:nvSpPr>
         <p:spPr>
           <a:xfrm>
-            <a:off x="3630168" y="1664208"/>
+            <a:off x="3630168" y="1591056"/>
             <a:ext cx="3886200" cy="365760"/>
           </a:xfrm>
           <a:prstGeom prst="rect">
@@ -11343,7 +11343,7 @@
         </p:nvSpPr>
         <p:spPr>
           <a:xfrm>
-            <a:off x="7589520" y="1554480"/>
+            <a:off x="7589520" y="1481328"/>
             <a:ext cx="4069080" cy="502920"/>
           </a:xfrm>
           <a:prstGeom prst="rect">
@@ -11386,7 +11386,7 @@
         </p:nvSpPr>
         <p:spPr>
           <a:xfrm>
-            <a:off x="7699248" y="1664208"/>
+            <a:off x="7699248" y="1591056"/>
             <a:ext cx="3886200" cy="365760"/>
           </a:xfrm>
           <a:prstGeom prst="rect">
@@ -11425,8 +11425,8 @@
         </p:nvSpPr>
         <p:spPr>
           <a:xfrm>
-            <a:off x="502920" y="2057400"/>
-            <a:ext cx="3017520" cy="777240"/>
+            <a:off x="502920" y="1984248"/>
+            <a:ext cx="3017520" cy="566928"/>
           </a:xfrm>
           <a:prstGeom prst="rect">
             <a:avLst/>
@@ -11468,7 +11468,7 @@
         </p:nvSpPr>
         <p:spPr>
           <a:xfrm>
-            <a:off x="612648" y="2258568"/>
+            <a:off x="612648" y="2112264"/>
             <a:ext cx="2834640" cy="457200"/>
           </a:xfrm>
           <a:prstGeom prst="rect">
@@ -11488,7 +11488,7 @@
               </a:spcAft>
             </a:pPr>
             <a:r>
-              <a:rPr sz="1400" b="0">
+              <a:rPr sz="1300" b="0">
                 <a:solidFill>
                   <a:srgbClr val="F3E6D4"/>
                 </a:solidFill>
@@ -11507,8 +11507,8 @@
         </p:nvSpPr>
         <p:spPr>
           <a:xfrm>
-            <a:off x="3520440" y="2057400"/>
-            <a:ext cx="4069080" cy="777240"/>
+            <a:off x="3520440" y="1984248"/>
+            <a:ext cx="4069080" cy="566928"/>
           </a:xfrm>
           <a:prstGeom prst="rect">
             <a:avLst/>
@@ -11550,7 +11550,7 @@
         </p:nvSpPr>
         <p:spPr>
           <a:xfrm>
-            <a:off x="3630168" y="2258568"/>
+            <a:off x="3630168" y="2112264"/>
             <a:ext cx="3886200" cy="457200"/>
           </a:xfrm>
           <a:prstGeom prst="rect">
@@ -11570,7 +11570,7 @@
               </a:spcAft>
             </a:pPr>
             <a:r>
-              <a:rPr sz="1400" b="1">
+              <a:rPr sz="1300" b="1">
                 <a:solidFill>
                   <a:srgbClr val="C44B2B"/>
                 </a:solidFill>
@@ -11589,8 +11589,8 @@
         </p:nvSpPr>
         <p:spPr>
           <a:xfrm>
-            <a:off x="7589520" y="2057400"/>
-            <a:ext cx="4069080" cy="777240"/>
+            <a:off x="7589520" y="1984248"/>
+            <a:ext cx="4069080" cy="566928"/>
           </a:xfrm>
           <a:prstGeom prst="rect">
             <a:avLst/>
@@ -11632,7 +11632,7 @@
         </p:nvSpPr>
         <p:spPr>
           <a:xfrm>
-            <a:off x="7699248" y="2258568"/>
+            <a:off x="7699248" y="2112264"/>
             <a:ext cx="3886200" cy="457200"/>
           </a:xfrm>
           <a:prstGeom prst="rect">
@@ -11652,13 +11652,13 @@
               </a:spcAft>
             </a:pPr>
             <a:r>
-              <a:rPr sz="1400" b="1">
+              <a:rPr sz="1300" b="1">
                 <a:solidFill>
                   <a:srgbClr val="2F9E8A"/>
                 </a:solidFill>
                 <a:latin typeface="Calibri"/>
               </a:rPr>
-              <a:t>72 ticks · 6/6 · 0 deadlocks</a:t>
+              <a:t>93 ticks · 6/6 · 0 deadlocks</a:t>
             </a:r>
           </a:p>
         </p:txBody>
@@ -11671,8 +11671,8 @@
         </p:nvSpPr>
         <p:spPr>
           <a:xfrm>
-            <a:off x="502920" y="2834640"/>
-            <a:ext cx="3017520" cy="777240"/>
+            <a:off x="502920" y="2551176"/>
+            <a:ext cx="3017520" cy="566928"/>
           </a:xfrm>
           <a:prstGeom prst="rect">
             <a:avLst/>
@@ -11714,7 +11714,7 @@
         </p:nvSpPr>
         <p:spPr>
           <a:xfrm>
-            <a:off x="612648" y="3035808"/>
+            <a:off x="612648" y="2679192"/>
             <a:ext cx="2834640" cy="457200"/>
           </a:xfrm>
           <a:prstGeom prst="rect">
@@ -11734,7 +11734,7 @@
               </a:spcAft>
             </a:pPr>
             <a:r>
-              <a:rPr sz="1400" b="0">
+              <a:rPr sz="1300" b="0">
                 <a:solidFill>
                   <a:srgbClr val="F3E6D4"/>
                 </a:solidFill>
@@ -11753,8 +11753,8 @@
         </p:nvSpPr>
         <p:spPr>
           <a:xfrm>
-            <a:off x="3520440" y="2834640"/>
-            <a:ext cx="4069080" cy="777240"/>
+            <a:off x="3520440" y="2551176"/>
+            <a:ext cx="4069080" cy="566928"/>
           </a:xfrm>
           <a:prstGeom prst="rect">
             <a:avLst/>
@@ -11796,7 +11796,7 @@
         </p:nvSpPr>
         <p:spPr>
           <a:xfrm>
-            <a:off x="3630168" y="3035808"/>
+            <a:off x="3630168" y="2679192"/>
             <a:ext cx="3886200" cy="457200"/>
           </a:xfrm>
           <a:prstGeom prst="rect">
@@ -11816,7 +11816,7 @@
               </a:spcAft>
             </a:pPr>
             <a:r>
-              <a:rPr sz="1400" b="1">
+              <a:rPr sz="1300" b="1">
                 <a:solidFill>
                   <a:srgbClr val="C44B2B"/>
                 </a:solidFill>
@@ -11835,8 +11835,8 @@
         </p:nvSpPr>
         <p:spPr>
           <a:xfrm>
-            <a:off x="7589520" y="2834640"/>
-            <a:ext cx="4069080" cy="777240"/>
+            <a:off x="7589520" y="2551176"/>
+            <a:ext cx="4069080" cy="566928"/>
           </a:xfrm>
           <a:prstGeom prst="rect">
             <a:avLst/>
@@ -11878,7 +11878,7 @@
         </p:nvSpPr>
         <p:spPr>
           <a:xfrm>
-            <a:off x="7699248" y="3035808"/>
+            <a:off x="7699248" y="2679192"/>
             <a:ext cx="3886200" cy="457200"/>
           </a:xfrm>
           <a:prstGeom prst="rect">
@@ -11898,13 +11898,13 @@
               </a:spcAft>
             </a:pPr>
             <a:r>
-              <a:rPr sz="1400" b="1">
+              <a:rPr sz="1300" b="1">
                 <a:solidFill>
                   <a:srgbClr val="2F9E8A"/>
                 </a:solidFill>
                 <a:latin typeface="Calibri"/>
               </a:rPr>
-              <a:t>51 ticks · 3/3 · 0 deadlocks</a:t>
+              <a:t>50 ticks · 3/3 · 0 deadlocks</a:t>
             </a:r>
           </a:p>
         </p:txBody>
@@ -11917,8 +11917,8 @@
         </p:nvSpPr>
         <p:spPr>
           <a:xfrm>
-            <a:off x="502920" y="3611880"/>
-            <a:ext cx="3017520" cy="777240"/>
+            <a:off x="502920" y="3118104"/>
+            <a:ext cx="3017520" cy="566928"/>
           </a:xfrm>
           <a:prstGeom prst="rect">
             <a:avLst/>
@@ -11960,7 +11960,7 @@
         </p:nvSpPr>
         <p:spPr>
           <a:xfrm>
-            <a:off x="612648" y="3813048"/>
+            <a:off x="612648" y="3246120"/>
             <a:ext cx="2834640" cy="457200"/>
           </a:xfrm>
           <a:prstGeom prst="rect">
@@ -11980,7 +11980,7 @@
               </a:spcAft>
             </a:pPr>
             <a:r>
-              <a:rPr sz="1400" b="0">
+              <a:rPr sz="1300" b="0">
                 <a:solidFill>
                   <a:srgbClr val="F3E6D4"/>
                 </a:solidFill>
@@ -11999,8 +11999,8 @@
         </p:nvSpPr>
         <p:spPr>
           <a:xfrm>
-            <a:off x="3520440" y="3611880"/>
-            <a:ext cx="4069080" cy="777240"/>
+            <a:off x="3520440" y="3118104"/>
+            <a:ext cx="4069080" cy="566928"/>
           </a:xfrm>
           <a:prstGeom prst="rect">
             <a:avLst/>
@@ -12042,7 +12042,7 @@
         </p:nvSpPr>
         <p:spPr>
           <a:xfrm>
-            <a:off x="3630168" y="3813048"/>
+            <a:off x="3630168" y="3246120"/>
             <a:ext cx="3886200" cy="457200"/>
           </a:xfrm>
           <a:prstGeom prst="rect">
@@ -12062,7 +12062,7 @@
               </a:spcAft>
             </a:pPr>
             <a:r>
-              <a:rPr sz="1400" b="1">
+              <a:rPr sz="1300" b="1">
                 <a:solidFill>
                   <a:srgbClr val="C44B2B"/>
                 </a:solidFill>
@@ -12081,8 +12081,8 @@
         </p:nvSpPr>
         <p:spPr>
           <a:xfrm>
-            <a:off x="7589520" y="3611880"/>
-            <a:ext cx="4069080" cy="777240"/>
+            <a:off x="7589520" y="3118104"/>
+            <a:ext cx="4069080" cy="566928"/>
           </a:xfrm>
           <a:prstGeom prst="rect">
             <a:avLst/>
@@ -12124,7 +12124,7 @@
         </p:nvSpPr>
         <p:spPr>
           <a:xfrm>
-            <a:off x="7699248" y="3813048"/>
+            <a:off x="7699248" y="3246120"/>
             <a:ext cx="3886200" cy="457200"/>
           </a:xfrm>
           <a:prstGeom prst="rect">
@@ -12144,27 +12144,70 @@
               </a:spcAft>
             </a:pPr>
             <a:r>
-              <a:rPr sz="1400" b="1">
+              <a:rPr sz="1300" b="1">
                 <a:solidFill>
                   <a:srgbClr val="2F9E8A"/>
                 </a:solidFill>
                 <a:latin typeface="Calibri"/>
               </a:rPr>
-              <a:t>85 ticks · 6/6 · 0 deadlocks</a:t>
-            </a:r>
-          </a:p>
-        </p:txBody>
-      </p:sp>
-      <p:sp>
-        <p:nvSpPr>
-          <p:cNvPr id="29" name="TextBox 28"/>
+              <a:t>99 ticks · 6/6 · 0 deadlocks</a:t>
+            </a:r>
+          </a:p>
+        </p:txBody>
+      </p:sp>
+      <p:sp>
+        <p:nvSpPr>
+          <p:cNvPr id="29" name="Rectangle 28"/>
+          <p:cNvSpPr/>
+          <p:nvPr/>
+        </p:nvSpPr>
+        <p:spPr>
+          <a:xfrm>
+            <a:off x="502920" y="3685032"/>
+            <a:ext cx="3017520" cy="566928"/>
+          </a:xfrm>
+          <a:prstGeom prst="rect">
+            <a:avLst/>
+          </a:prstGeom>
+          <a:solidFill>
+            <a:srgbClr val="2C241C"/>
+          </a:solidFill>
+          <a:ln>
+            <a:noFill/>
+          </a:ln>
+        </p:spPr>
+        <p:style>
+          <a:lnRef idx="1">
+            <a:schemeClr val="accent1"/>
+          </a:lnRef>
+          <a:fillRef idx="3">
+            <a:schemeClr val="accent1"/>
+          </a:fillRef>
+          <a:effectRef idx="2">
+            <a:schemeClr val="accent1"/>
+          </a:effectRef>
+          <a:fontRef idx="minor">
+            <a:schemeClr val="lt1"/>
+          </a:fontRef>
+        </p:style>
+        <p:txBody>
+          <a:bodyPr rtlCol="0" anchor="ctr"/>
+          <a:lstStyle/>
+          <a:p>
+            <a:pPr algn="ctr"/>
+          </a:p>
+        </p:txBody>
+      </p:sp>
+      <p:sp>
+        <p:nvSpPr>
+          <p:cNvPr id="30" name="TextBox 29"/>
           <p:cNvSpPr txBox="1"/>
           <p:nvPr/>
         </p:nvSpPr>
         <p:spPr>
           <a:xfrm>
-            <a:off x="502920" y="4709160"/>
-            <a:ext cx="11155680" cy="1554480"/>
+            <a:off x="612648" y="3813048"/>
+            <a:ext cx="2834640" cy="457200"/>
           </a:xfrm>
           <a:prstGeom prst="rect">
             <a:avLst/>
@@ -12183,7 +12226,210 @@
               </a:spcAft>
             </a:pPr>
             <a:r>
-              <a:rPr sz="1600" b="1">
+              <a:rPr sz="1300" b="0">
+                <a:solidFill>
+                  <a:srgbClr val="F3E6D4"/>
+                </a:solidFill>
+                <a:latin typeface="Calibri"/>
+              </a:rPr>
+              <a:t>8 robots · 16 tasks</a:t>
+            </a:r>
+          </a:p>
+        </p:txBody>
+      </p:sp>
+      <p:sp>
+        <p:nvSpPr>
+          <p:cNvPr id="31" name="Rectangle 30"/>
+          <p:cNvSpPr/>
+          <p:nvPr/>
+        </p:nvSpPr>
+        <p:spPr>
+          <a:xfrm>
+            <a:off x="3520440" y="3685032"/>
+            <a:ext cx="4069080" cy="566928"/>
+          </a:xfrm>
+          <a:prstGeom prst="rect">
+            <a:avLst/>
+          </a:prstGeom>
+          <a:solidFill>
+            <a:srgbClr val="2C241C"/>
+          </a:solidFill>
+          <a:ln>
+            <a:noFill/>
+          </a:ln>
+        </p:spPr>
+        <p:style>
+          <a:lnRef idx="1">
+            <a:schemeClr val="accent1"/>
+          </a:lnRef>
+          <a:fillRef idx="3">
+            <a:schemeClr val="accent1"/>
+          </a:fillRef>
+          <a:effectRef idx="2">
+            <a:schemeClr val="accent1"/>
+          </a:effectRef>
+          <a:fontRef idx="minor">
+            <a:schemeClr val="lt1"/>
+          </a:fontRef>
+        </p:style>
+        <p:txBody>
+          <a:bodyPr rtlCol="0" anchor="ctr"/>
+          <a:lstStyle/>
+          <a:p>
+            <a:pPr algn="ctr"/>
+          </a:p>
+        </p:txBody>
+      </p:sp>
+      <p:sp>
+        <p:nvSpPr>
+          <p:cNvPr id="32" name="TextBox 31"/>
+          <p:cNvSpPr txBox="1"/>
+          <p:nvPr/>
+        </p:nvSpPr>
+        <p:spPr>
+          <a:xfrm>
+            <a:off x="3630168" y="3813048"/>
+            <a:ext cx="3886200" cy="457200"/>
+          </a:xfrm>
+          <a:prstGeom prst="rect">
+            <a:avLst/>
+          </a:prstGeom>
+          <a:noFill/>
+        </p:spPr>
+        <p:txBody>
+          <a:bodyPr wrap="square">
+            <a:spAutoFit/>
+          </a:bodyPr>
+          <a:lstStyle/>
+          <a:p>
+            <a:pPr algn="l">
+              <a:spcAft>
+                <a:spcPts val="600"/>
+              </a:spcAft>
+            </a:pPr>
+            <a:r>
+              <a:rPr sz="1300" b="1">
+                <a:solidFill>
+                  <a:srgbClr val="C44B2B"/>
+                </a:solidFill>
+                <a:latin typeface="Calibri"/>
+              </a:rPr>
+              <a:t>incomplete · 1/16 jobs · 8 deadlocks · 1 stalls</a:t>
+            </a:r>
+          </a:p>
+        </p:txBody>
+      </p:sp>
+      <p:sp>
+        <p:nvSpPr>
+          <p:cNvPr id="33" name="Rectangle 32"/>
+          <p:cNvSpPr/>
+          <p:nvPr/>
+        </p:nvSpPr>
+        <p:spPr>
+          <a:xfrm>
+            <a:off x="7589520" y="3685032"/>
+            <a:ext cx="4069080" cy="566928"/>
+          </a:xfrm>
+          <a:prstGeom prst="rect">
+            <a:avLst/>
+          </a:prstGeom>
+          <a:solidFill>
+            <a:srgbClr val="2C241C"/>
+          </a:solidFill>
+          <a:ln>
+            <a:noFill/>
+          </a:ln>
+        </p:spPr>
+        <p:style>
+          <a:lnRef idx="1">
+            <a:schemeClr val="accent1"/>
+          </a:lnRef>
+          <a:fillRef idx="3">
+            <a:schemeClr val="accent1"/>
+          </a:fillRef>
+          <a:effectRef idx="2">
+            <a:schemeClr val="accent1"/>
+          </a:effectRef>
+          <a:fontRef idx="minor">
+            <a:schemeClr val="lt1"/>
+          </a:fontRef>
+        </p:style>
+        <p:txBody>
+          <a:bodyPr rtlCol="0" anchor="ctr"/>
+          <a:lstStyle/>
+          <a:p>
+            <a:pPr algn="ctr"/>
+          </a:p>
+        </p:txBody>
+      </p:sp>
+      <p:sp>
+        <p:nvSpPr>
+          <p:cNvPr id="34" name="TextBox 33"/>
+          <p:cNvSpPr txBox="1"/>
+          <p:nvPr/>
+        </p:nvSpPr>
+        <p:spPr>
+          <a:xfrm>
+            <a:off x="7699248" y="3813048"/>
+            <a:ext cx="3886200" cy="457200"/>
+          </a:xfrm>
+          <a:prstGeom prst="rect">
+            <a:avLst/>
+          </a:prstGeom>
+          <a:noFill/>
+        </p:spPr>
+        <p:txBody>
+          <a:bodyPr wrap="square">
+            <a:spAutoFit/>
+          </a:bodyPr>
+          <a:lstStyle/>
+          <a:p>
+            <a:pPr algn="l">
+              <a:spcAft>
+                <a:spcPts val="600"/>
+              </a:spcAft>
+            </a:pPr>
+            <a:r>
+              <a:rPr sz="1300" b="1">
+                <a:solidFill>
+                  <a:srgbClr val="2F9E8A"/>
+                </a:solidFill>
+                <a:latin typeface="Calibri"/>
+              </a:rPr>
+              <a:t>327 ticks · 16/16 · 13 conflicts · 2 handoffs</a:t>
+            </a:r>
+          </a:p>
+        </p:txBody>
+      </p:sp>
+      <p:sp>
+        <p:nvSpPr>
+          <p:cNvPr id="35" name="TextBox 34"/>
+          <p:cNvSpPr txBox="1"/>
+          <p:nvPr/>
+        </p:nvSpPr>
+        <p:spPr>
+          <a:xfrm>
+            <a:off x="502920" y="4334256"/>
+            <a:ext cx="11155680" cy="2377440"/>
+          </a:xfrm>
+          <a:prstGeom prst="rect">
+            <a:avLst/>
+          </a:prstGeom>
+          <a:noFill/>
+        </p:spPr>
+        <p:txBody>
+          <a:bodyPr wrap="square">
+            <a:spAutoFit/>
+          </a:bodyPr>
+          <a:lstStyle/>
+          <a:p>
+            <a:pPr algn="l">
+              <a:spcAft>
+                <a:spcPts val="400"/>
+              </a:spcAft>
+            </a:pPr>
+            <a:r>
+              <a:rPr sz="1500" b="1">
                 <a:solidFill>
                   <a:srgbClr val="E0A106"/>
                 </a:solidFill>
@@ -12199,13 +12445,61 @@
               </a:spcAft>
             </a:pPr>
             <a:r>
-              <a:rPr sz="1600" b="0">
+              <a:rPr sz="1500" b="0">
                 <a:solidFill>
                   <a:srgbClr val="F3E6D4"/>
                 </a:solidFill>
                 <a:latin typeface="Calibri"/>
               </a:rPr>
-              <a:t>Stop-and-wait freezes on mutual occupancy, so distance is low and wait ≈ 1. UBPA travels farther because it finishes the jobs. Tick limit 800. comparable=false, so improvement % is n/a.</a:t>
+              <a:t>Stop-and-wait freezes on mutual occupancy, so distance is low and wait ≈ 1. UBPA travels farther because it finishes the jobs. Tick limit 800. comparable=false, so improvement % is n/a. Clean run finishes at 93 ticks.</a:t>
+            </a:r>
+          </a:p>
+          <a:p>
+            <a:pPr algn="l">
+              <a:spcAft>
+                <a:spcPts val="600"/>
+              </a:spcAft>
+            </a:pPr>
+            <a:r>
+              <a:rPr sz="1300" b="0">
+                <a:solidFill>
+                  <a:srgbClr val="B9A58C"/>
+                </a:solidFill>
+                <a:latin typeface="Calibri"/>
+              </a:rPr>
+              <a:t>Scale (probe, not headline): 8 robots / 16 tasks finish on 5/5 seeds at 327 ticks, 13 conflicts, 2 stall handoffs. Stop-and-wait finishes 0/5. 6 robots / 12 tasks finish 5/5 at 99 ticks; 10 robots / 20 tasks finish 5/5 at 180 ticks.</a:t>
+            </a:r>
+          </a:p>
+          <a:p>
+            <a:pPr algn="l">
+              <a:spcAft>
+                <a:spcPts val="600"/>
+              </a:spcAft>
+            </a:pPr>
+            <a:r>
+              <a:rPr sz="1300" b="0">
+                <a:solidFill>
+                  <a:srgbClr val="B9A58C"/>
+                </a:solidFill>
+                <a:latin typeface="Calibri"/>
+              </a:rPr>
+              <a:t>Attribution: the 5 fixes RC1-RC5 were each switched off. All off, 3-tick radio delay finishes 0/5 runs (577 intention conflicts); all off, 70% loss drops 5106 packets/run; RC5 off alone leaves the 8-robot run at 14/16 tasks with 37 deadlocks and no finish.</a:t>
+            </a:r>
+          </a:p>
+          <a:p>
+            <a:pPr algn="l">
+              <a:spcAft>
+                <a:spcPts val="600"/>
+              </a:spcAft>
+            </a:pPr>
+            <a:r>
+              <a:rPr sz="1300" b="0">
+                <a:solidFill>
+                  <a:srgbClr val="B9A58C"/>
+                </a:solidFill>
+                <a:latin typeface="Calibri"/>
+              </a:rPr>
+              <a:t>Published trade-off: with age-corrected peer reservations off (RC2) the 3-tick delay case still finishes but at 94 ticks with 3 intention conflicts, against 103 ticks and 0 conflicts shipped. We pay 9 ticks to remove those conflicts.</a:t>
             </a:r>
           </a:p>
         </p:txBody>
